--- a/deliverables/Chordnote-PPT-模板.pptx
+++ b/deliverables/Chordnote-PPT-模板.pptx
@@ -4799,7 +4799,7 @@
                 <a:ea typeface="Microsoft YaHei" pitchFamily="34" charset="-122"/>
                 <a:cs typeface="Microsoft YaHei" pitchFamily="34" charset="-120"/>
               </a:rPr>
-              <a:t>演示站：https://hilarious-kheer-89a440.netlify.app</a:t>
+              <a:t>本机运行：pnpm install → pnpm dev　·　界面预览：deliverables/Chordnote-界面预览.html</a:t>
             </a:r>
             <a:endParaRPr lang="en-US" sz="1300" dirty="0"/>
           </a:p>
